--- a/docs/ARCHITECTURE_DECK.pptx
+++ b/docs/ARCHITECTURE_DECK.pptx
@@ -3522,7 +3522,7 @@
                 </a:solidFill>
                 <a:latin typeface="Arial"/>
               </a:rPr>
-              <a:t>H2A converts a SAP Hybris commerce monolith — Java/Spring, items.xml, and a Spartacus storefront — into a deployable Salesforce project of Apex, LWC, and metadata, with a human review gate at every consequential step.</a:t>
+              <a:t>Portage converts a SAP Hybris commerce monolith — Java/Spring, items.xml, and a Spartacus storefront — into a deployable Salesforce project of Apex, LWC, and metadata, with a human review gate at every consequential step.</a:t>
             </a:r>
           </a:p>
         </p:txBody>
@@ -3670,7 +3670,7 @@
         <p:spPr>
           <a:xfrm>
             <a:off x="2203704" y="4434840"/>
-            <a:ext cx="1143000" cy="384048"/>
+            <a:ext cx="1490472" cy="384048"/>
           </a:xfrm>
           <a:prstGeom prst="rect">
             <a:avLst/>
@@ -3714,7 +3714,7 @@
         <p:spPr>
           <a:xfrm>
             <a:off x="2203704" y="4434840"/>
-            <a:ext cx="1143000" cy="384048"/>
+            <a:ext cx="1490472" cy="384048"/>
           </a:xfrm>
           <a:prstGeom prst="rect">
             <a:avLst/>
@@ -3745,7 +3745,7 @@
                 </a:solidFill>
                 <a:latin typeface="Courier New"/>
               </a:rPr>
-              <a:t>H2A ENGINE</a:t>
+              <a:t>PORTAGE ENGINE</a:t>
             </a:r>
           </a:p>
         </p:txBody>
@@ -3758,7 +3758,7 @@
         </p:nvSpPr>
         <p:spPr>
           <a:xfrm>
-            <a:off x="3346704" y="4434840"/>
+            <a:off x="3694176" y="4434840"/>
             <a:ext cx="457200" cy="384048"/>
           </a:xfrm>
           <a:prstGeom prst="rect">
@@ -3803,7 +3803,7 @@
         </p:nvSpPr>
         <p:spPr>
           <a:xfrm>
-            <a:off x="3803904" y="4434840"/>
+            <a:off x="4151376" y="4434840"/>
             <a:ext cx="1143000" cy="384048"/>
           </a:xfrm>
           <a:prstGeom prst="rect">
@@ -3847,7 +3847,7 @@
         </p:nvSpPr>
         <p:spPr>
           <a:xfrm>
-            <a:off x="3803904" y="4434840"/>
+            <a:off x="4151376" y="4434840"/>
             <a:ext cx="1143000" cy="384048"/>
           </a:xfrm>
           <a:prstGeom prst="rect">
@@ -4224,7 +4224,7 @@
                 </a:solidFill>
                 <a:latin typeface="Courier New"/>
               </a:rPr>
-              <a:t>H2A MIGRATOR · ARCHITECTURE</a:t>
+              <a:t>PORTAGE · ARCHITECTURE</a:t>
             </a:r>
           </a:p>
         </p:txBody>
@@ -4607,7 +4607,7 @@
                 </a:solidFill>
                 <a:latin typeface="Courier New"/>
               </a:rPr>
-              <a:t>H2A MIGRATOR · ARCHITECTURE</a:t>
+              <a:t>PORTAGE · ARCHITECTURE</a:t>
             </a:r>
           </a:p>
         </p:txBody>
@@ -6355,7 +6355,7 @@
                 </a:solidFill>
                 <a:latin typeface="Courier New"/>
               </a:rPr>
-              <a:t>H2A MIGRATOR · ARCHITECTURE</a:t>
+              <a:t>PORTAGE · ARCHITECTURE</a:t>
             </a:r>
           </a:p>
         </p:txBody>
@@ -6738,7 +6738,7 @@
                 </a:solidFill>
                 <a:latin typeface="Courier New"/>
               </a:rPr>
-              <a:t>H2A MIGRATOR · ARCHITECTURE</a:t>
+              <a:t>PORTAGE · ARCHITECTURE</a:t>
             </a:r>
           </a:p>
         </p:txBody>
@@ -8849,7 +8849,7 @@
                 </a:solidFill>
                 <a:latin typeface="Courier New"/>
               </a:rPr>
-              <a:t>H2A MIGRATOR · ARCHITECTURE</a:t>
+              <a:t>PORTAGE · ARCHITECTURE</a:t>
             </a:r>
           </a:p>
         </p:txBody>
@@ -9232,7 +9232,7 @@
                 </a:solidFill>
                 <a:latin typeface="Courier New"/>
               </a:rPr>
-              <a:t>H2A MIGRATOR · ARCHITECTURE</a:t>
+              <a:t>PORTAGE · ARCHITECTURE</a:t>
             </a:r>
           </a:p>
         </p:txBody>
@@ -10671,7 +10671,7 @@
                 </a:solidFill>
                 <a:latin typeface="Courier New"/>
               </a:rPr>
-              <a:t>H2A MIGRATOR · ARCHITECTURE</a:t>
+              <a:t>PORTAGE · ARCHITECTURE</a:t>
             </a:r>
           </a:p>
         </p:txBody>
@@ -11054,7 +11054,7 @@
                 </a:solidFill>
                 <a:latin typeface="Courier New"/>
               </a:rPr>
-              <a:t>H2A MIGRATOR · ARCHITECTURE</a:t>
+              <a:t>PORTAGE · ARCHITECTURE</a:t>
             </a:r>
           </a:p>
         </p:txBody>
@@ -13014,7 +13014,7 @@
                 </a:solidFill>
                 <a:latin typeface="Courier New"/>
               </a:rPr>
-              <a:t>H2A MIGRATOR · ARCHITECTURE</a:t>
+              <a:t>PORTAGE · ARCHITECTURE</a:t>
             </a:r>
           </a:p>
         </p:txBody>
@@ -15457,7 +15457,7 @@
                 </a:solidFill>
                 <a:latin typeface="Courier New"/>
               </a:rPr>
-              <a:t>H2A MIGRATOR · ARCHITECTURE</a:t>
+              <a:t>PORTAGE · ARCHITECTURE</a:t>
             </a:r>
           </a:p>
         </p:txBody>
@@ -16894,7 +16894,7 @@
                 </a:solidFill>
                 <a:latin typeface="Courier New"/>
               </a:rPr>
-              <a:t>H2A MIGRATOR · ARCHITECTURE</a:t>
+              <a:t>PORTAGE · ARCHITECTURE</a:t>
             </a:r>
           </a:p>
         </p:txBody>
@@ -19025,7 +19025,7 @@
                 </a:solidFill>
                 <a:latin typeface="Courier New"/>
               </a:rPr>
-              <a:t>H2A MIGRATOR · ARCHITECTURE</a:t>
+              <a:t>PORTAGE · ARCHITECTURE</a:t>
             </a:r>
           </a:p>
         </p:txBody>
@@ -21139,7 +21139,7 @@
                 </a:solidFill>
                 <a:latin typeface="Courier New"/>
               </a:rPr>
-              <a:t>H2A MIGRATOR · ARCHITECTURE</a:t>
+              <a:t>PORTAGE · ARCHITECTURE</a:t>
             </a:r>
           </a:p>
         </p:txBody>
